--- a/pptx/Part 2 - Deploying a Fabric CICD Project.pptx
+++ b/pptx/Part 2 - Deploying a Fabric CICD Project.pptx
@@ -580,7 +580,7 @@
           <a:p>
             <a:fld id="{DCE60099-03E7-4FA1-8A7F-E6E6CFB0F855}" type="datetime8">
               <a:rPr lang="en-US" smtClean="0"/>
-              <a:t>4/17/2026 3:19 PM</a:t>
+              <a:t>5/21/2026 9:58 AM</a:t>
             </a:fld>
             <a:endParaRPr lang="en-US"/>
           </a:p>
@@ -49971,6 +49971,16 @@
 </file>
 
 <file path=customXml/item1.xml><?xml version="1.0" encoding="utf-8"?>
+<p:properties xmlns:p="http://schemas.microsoft.com/office/2006/metadata/properties" xmlns:xsi="http://www.w3.org/2001/XMLSchema-instance" xmlns:pc="http://schemas.microsoft.com/office/infopath/2007/PartnerControls">
+  <documentManagement>
+    <_ip_UnifiedCompliancePolicyUIAction xmlns="http://schemas.microsoft.com/sharepoint/v3" xsi:nil="true"/>
+    <_ip_UnifiedCompliancePolicyProperties xmlns="http://schemas.microsoft.com/sharepoint/v3" xsi:nil="true"/>
+    <_activity xmlns="3c10a0e8-556e-4c2d-9121-1181542ea83c" xsi:nil="true"/>
+  </documentManagement>
+</p:properties>
+</file>
+
+<file path=customXml/item2.xml><?xml version="1.0" encoding="utf-8"?>
 <?mso-contentType ?>
 <FormTemplates xmlns="http://schemas.microsoft.com/sharepoint/v3/contenttype/forms">
   <Display>DocumentLibraryForm</Display>
@@ -49979,7 +49989,7 @@
 </FormTemplates>
 </file>
 
-<file path=customXml/item2.xml><?xml version="1.0" encoding="utf-8"?>
+<file path=customXml/item3.xml><?xml version="1.0" encoding="utf-8"?>
 <ct:contentTypeSchema xmlns:ct="http://schemas.microsoft.com/office/2006/metadata/contentType" xmlns:ma="http://schemas.microsoft.com/office/2006/metadata/properties/metaAttributes" ct:_="" ma:_="" ma:contentTypeName="Document" ma:contentTypeID="0x010100B63AD2D799A0384499DFA8618B2D06C3" ma:contentTypeVersion="19" ma:contentTypeDescription="Create a new document." ma:contentTypeScope="" ma:versionID="4ad8bb11041bccc4900be347311affd5">
   <xsd:schema xmlns:xsd="http://www.w3.org/2001/XMLSchema" xmlns:xs="http://www.w3.org/2001/XMLSchema" xmlns:p="http://schemas.microsoft.com/office/2006/metadata/properties" xmlns:ns1="http://schemas.microsoft.com/sharepoint/v3" xmlns:ns3="3c10a0e8-556e-4c2d-9121-1181542ea83c" xmlns:ns4="91f22b01-9196-48cc-8d58-ee179122dd75" targetNamespace="http://schemas.microsoft.com/office/2006/metadata/properties" ma:root="true" ma:fieldsID="55cc422832b79ebb748bec44d447ca3b" ns1:_="" ns3:_="" ns4:_="">
     <xsd:import namespace="http://schemas.microsoft.com/sharepoint/v3"/>
@@ -50243,17 +50253,25 @@
 </ct:contentTypeSchema>
 </file>
 
-<file path=customXml/item3.xml><?xml version="1.0" encoding="utf-8"?>
-<p:properties xmlns:p="http://schemas.microsoft.com/office/2006/metadata/properties" xmlns:xsi="http://www.w3.org/2001/XMLSchema-instance" xmlns:pc="http://schemas.microsoft.com/office/infopath/2007/PartnerControls">
-  <documentManagement>
-    <_ip_UnifiedCompliancePolicyUIAction xmlns="http://schemas.microsoft.com/sharepoint/v3" xsi:nil="true"/>
-    <_ip_UnifiedCompliancePolicyProperties xmlns="http://schemas.microsoft.com/sharepoint/v3" xsi:nil="true"/>
-    <_activity xmlns="3c10a0e8-556e-4c2d-9121-1181542ea83c" xsi:nil="true"/>
-  </documentManagement>
-</p:properties>
+<file path=customXml/itemProps1.xml><?xml version="1.0" encoding="utf-8"?>
+<ds:datastoreItem xmlns:ds="http://schemas.openxmlformats.org/officeDocument/2006/customXml" ds:itemID="{F990F116-B58F-4255-B05B-DA3808E0E5C6}">
+  <ds:schemaRefs>
+    <ds:schemaRef ds:uri="http://schemas.openxmlformats.org/package/2006/metadata/core-properties"/>
+    <ds:schemaRef ds:uri="http://purl.org/dc/elements/1.1/"/>
+    <ds:schemaRef ds:uri="http://purl.org/dc/dcmitype/"/>
+    <ds:schemaRef ds:uri="http://schemas.microsoft.com/office/2006/documentManagement/types"/>
+    <ds:schemaRef ds:uri="http://schemas.microsoft.com/office/2006/metadata/properties"/>
+    <ds:schemaRef ds:uri="http://purl.org/dc/terms/"/>
+    <ds:schemaRef ds:uri="http://schemas.microsoft.com/sharepoint/v3"/>
+    <ds:schemaRef ds:uri="http://www.w3.org/XML/1998/namespace"/>
+    <ds:schemaRef ds:uri="http://schemas.microsoft.com/office/infopath/2007/PartnerControls"/>
+    <ds:schemaRef ds:uri="91f22b01-9196-48cc-8d58-ee179122dd75"/>
+    <ds:schemaRef ds:uri="3c10a0e8-556e-4c2d-9121-1181542ea83c"/>
+  </ds:schemaRefs>
+</ds:datastoreItem>
 </file>
 
-<file path=customXml/itemProps1.xml><?xml version="1.0" encoding="utf-8"?>
+<file path=customXml/itemProps2.xml><?xml version="1.0" encoding="utf-8"?>
 <ds:datastoreItem xmlns:ds="http://schemas.openxmlformats.org/officeDocument/2006/customXml" ds:itemID="{758FDAC0-319D-4A54-8D8E-1D42CB1F8004}">
   <ds:schemaRefs>
     <ds:schemaRef ds:uri="http://schemas.microsoft.com/sharepoint/v3/contenttype/forms"/>
@@ -50261,7 +50279,7 @@
 </ds:datastoreItem>
 </file>
 
-<file path=customXml/itemProps2.xml><?xml version="1.0" encoding="utf-8"?>
+<file path=customXml/itemProps3.xml><?xml version="1.0" encoding="utf-8"?>
 <ds:datastoreItem xmlns:ds="http://schemas.openxmlformats.org/officeDocument/2006/customXml" ds:itemID="{C2411704-DA91-4A2A-81D1-00044852D0BE}">
   <ds:schemaRefs>
     <ds:schemaRef ds:uri="3c10a0e8-556e-4c2d-9121-1181542ea83c"/>
@@ -50281,24 +50299,6 @@
 </ds:datastoreItem>
 </file>
 
-<file path=customXml/itemProps3.xml><?xml version="1.0" encoding="utf-8"?>
-<ds:datastoreItem xmlns:ds="http://schemas.openxmlformats.org/officeDocument/2006/customXml" ds:itemID="{F990F116-B58F-4255-B05B-DA3808E0E5C6}">
-  <ds:schemaRefs>
-    <ds:schemaRef ds:uri="http://schemas.openxmlformats.org/package/2006/metadata/core-properties"/>
-    <ds:schemaRef ds:uri="http://purl.org/dc/elements/1.1/"/>
-    <ds:schemaRef ds:uri="http://purl.org/dc/dcmitype/"/>
-    <ds:schemaRef ds:uri="http://schemas.microsoft.com/office/2006/documentManagement/types"/>
-    <ds:schemaRef ds:uri="http://schemas.microsoft.com/office/2006/metadata/properties"/>
-    <ds:schemaRef ds:uri="http://purl.org/dc/terms/"/>
-    <ds:schemaRef ds:uri="http://schemas.microsoft.com/sharepoint/v3"/>
-    <ds:schemaRef ds:uri="http://www.w3.org/XML/1998/namespace"/>
-    <ds:schemaRef ds:uri="http://schemas.microsoft.com/office/infopath/2007/PartnerControls"/>
-    <ds:schemaRef ds:uri="91f22b01-9196-48cc-8d58-ee179122dd75"/>
-    <ds:schemaRef ds:uri="3c10a0e8-556e-4c2d-9121-1181542ea83c"/>
-  </ds:schemaRefs>
-</ds:datastoreItem>
-</file>
-
 <file path=docMetadata/LabelInfo.xml><?xml version="1.0" encoding="utf-8"?>
 <clbl:labelList xmlns:clbl="http://schemas.microsoft.com/office/2020/mipLabelMetadata">
   <clbl:label id="{87867195-f2b8-4ac2-b0b6-6bb73cb33afc}" enabled="1" method="Privileged" siteId="{72f988bf-86f1-41af-91ab-2d7cd011db47}" removed="0"/>
